--- a/company-profile/jaekyung-company-profile-2026.pptx
+++ b/company-profile/jaekyung-company-profile-2026.pptx
@@ -2415,7 +2415,7 @@
                 <a:ea typeface="Malgun Gothic" pitchFamily="34" charset="-122"/>
                 <a:cs typeface="Malgun Gothic" pitchFamily="34" charset="-120"/>
               </a:rPr>
-              <a:t>070-8098-4559</a:t>
+              <a:t>010-5516-0301</a:t>
             </a:r>
             <a:endParaRPr lang="en-US" sz="1300" dirty="0"/>
           </a:p>
@@ -2493,7 +2493,7 @@
                 <a:ea typeface="Malgun Gothic" pitchFamily="34" charset="-122"/>
                 <a:cs typeface="Malgun Gothic" pitchFamily="34" charset="-120"/>
               </a:rPr>
-              <a:t>contact@jeakyung.com</a:t>
+              <a:t>sk@jeakyung.com</a:t>
             </a:r>
             <a:endParaRPr lang="en-US" sz="1300" dirty="0"/>
           </a:p>
@@ -7106,7 +7106,7 @@
                 <a:ea typeface="Malgun Gothic" pitchFamily="34" charset="-122"/>
                 <a:cs typeface="Malgun Gothic" pitchFamily="34" charset="-120"/>
               </a:rPr>
-              <a:t>070-8098-4559</a:t>
+              <a:t>010-5516-0301</a:t>
             </a:r>
             <a:endParaRPr lang="en-US" sz="1600" dirty="0"/>
           </a:p>
@@ -7320,7 +7320,7 @@
                 <a:ea typeface="Malgun Gothic" pitchFamily="34" charset="-122"/>
                 <a:cs typeface="Malgun Gothic" pitchFamily="34" charset="-120"/>
               </a:rPr>
-              <a:t>contact@jeakyung.com</a:t>
+              <a:t>sk@jeakyung.com</a:t>
             </a:r>
             <a:endParaRPr lang="en-US" sz="1600" dirty="0"/>
           </a:p>
@@ -16340,7 +16340,7 @@
         <p:spPr>
           <a:xfrm>
             <a:off x="6803136" y="4160520"/>
-            <a:ext cx="1078992" cy="502920"/>
+            <a:ext cx="1188720" cy="502920"/>
           </a:xfrm>
           <a:prstGeom prst="roundRect">
             <a:avLst>
@@ -16348,7 +16348,7 @@
             </a:avLst>
           </a:prstGeom>
           <a:solidFill>
-            <a:srgbClr val="EEF1F7"/>
+            <a:srgbClr val="071044"/>
           </a:solidFill>
           <a:ln/>
         </p:spPr>
@@ -16362,7 +16362,7 @@
         <p:spPr>
           <a:xfrm>
             <a:off x="6803136" y="4160520"/>
-            <a:ext cx="1078992" cy="502920"/>
+            <a:ext cx="1188720" cy="502920"/>
           </a:xfrm>
           <a:prstGeom prst="rect">
             <a:avLst/>
@@ -16378,9 +16378,9 @@
               <a:buNone/>
             </a:pPr>
             <a:r>
-              <a:rPr lang="en-US" sz="1200" b="1" dirty="0">
-                <a:solidFill>
-                  <a:srgbClr val="071044"/>
+              <a:rPr lang="en-US" sz="1400" b="1" dirty="0">
+                <a:solidFill>
+                  <a:srgbClr val="FFFFFF"/>
                 </a:solidFill>
                 <a:latin typeface="Malgun Gothic" pitchFamily="34" charset="0"/>
                 <a:ea typeface="Malgun Gothic" pitchFamily="34" charset="-122"/>
@@ -16388,7 +16388,7 @@
               </a:rPr>
               <a:t>푸드나무</a:t>
             </a:r>
-            <a:endParaRPr lang="en-US" sz="1200" dirty="0"/>
+            <a:endParaRPr lang="en-US" sz="1400" dirty="0"/>
           </a:p>
         </p:txBody>
       </p:sp>
